--- a/databricks-poc/Utilitics_OnePager.pptx
+++ b/databricks-poc/Utilitics_OnePager.pptx
@@ -5,9 +5,9 @@
     <p:sldMasterId id="2147483648" r:id="rId1"/>
   </p:sldMasterIdLst>
   <p:sldIdLst>
-    <p:sldId id="256" r:id="rId2"/>
+    <p:sldId id="256" r:id="rId7"/>
   </p:sldIdLst>
-  <p:sldSz cx="12188825" cy="6858000"/>
+  <p:sldSz cx="12188952" cy="6858000" type="screen4x3"/>
   <p:notesSz cx="6858000" cy="9144000"/>
   <p:defaultTextStyle>
     <a:defPPr>
@@ -104,22 +104,6 @@
       </a:defRPr>
     </a:lvl9pPr>
   </p:defaultTextStyle>
-  <p:extLst>
-    <p:ext uri="{EFAFB233-063F-42B5-8137-9DF3F51BA10A}">
-      <p15:sldGuideLst xmlns:p15="http://schemas.microsoft.com/office/powerpoint/2012/main">
-        <p15:guide id="1" orient="horz" pos="2160">
-          <p15:clr>
-            <a:srgbClr val="A4A3A4"/>
-          </p15:clr>
-        </p15:guide>
-        <p15:guide id="2" pos="2880">
-          <p15:clr>
-            <a:srgbClr val="A4A3A4"/>
-          </p15:clr>
-        </p15:guide>
-      </p15:sldGuideLst>
-    </p:ext>
-  </p:extLst>
 </p:presentation>
 </file>
 
@@ -161,9 +145,10 @@
           <a:lstStyle/>
           <a:p>
             <a:r>
-              <a:rPr lang="en-US"/>
+              <a:rPr lang="en-US" smtClean="0"/>
               <a:t>Click to edit Master title style</a:t>
             </a:r>
+            <a:endParaRPr lang="en-US"/>
           </a:p>
         </p:txBody>
       </p:sp>
@@ -279,9 +264,10 @@
           </a:lstStyle>
           <a:p>
             <a:r>
-              <a:rPr lang="en-US"/>
+              <a:rPr lang="en-US" smtClean="0"/>
               <a:t>Click to edit Master subtitle style</a:t>
             </a:r>
+            <a:endParaRPr lang="en-US"/>
           </a:p>
         </p:txBody>
       </p:sp>
@@ -302,7 +288,7 @@
           <a:p>
             <a:fld id="{5BCAD085-E8A6-8845-BD4E-CB4CCA059FC4}" type="datetimeFigureOut">
               <a:rPr lang="en-US" smtClean="0"/>
-              <a:t>3/19/2026</a:t>
+              <a:t>1/27/13</a:t>
             </a:fld>
             <a:endParaRPr lang="en-US"/>
           </a:p>
@@ -396,9 +382,10 @@
           <a:lstStyle/>
           <a:p>
             <a:r>
-              <a:rPr lang="en-US"/>
+              <a:rPr lang="en-US" smtClean="0"/>
               <a:t>Click to edit Master title style</a:t>
             </a:r>
+            <a:endParaRPr lang="en-US"/>
           </a:p>
         </p:txBody>
       </p:sp>
@@ -419,37 +406,38 @@
           <a:p>
             <a:pPr lvl="0"/>
             <a:r>
-              <a:rPr lang="en-US"/>
+              <a:rPr lang="en-US" smtClean="0"/>
               <a:t>Click to edit Master text styles</a:t>
             </a:r>
           </a:p>
           <a:p>
             <a:pPr lvl="1"/>
             <a:r>
-              <a:rPr lang="en-US"/>
+              <a:rPr lang="en-US" smtClean="0"/>
               <a:t>Second level</a:t>
             </a:r>
           </a:p>
           <a:p>
             <a:pPr lvl="2"/>
             <a:r>
-              <a:rPr lang="en-US"/>
+              <a:rPr lang="en-US" smtClean="0"/>
               <a:t>Third level</a:t>
             </a:r>
           </a:p>
           <a:p>
             <a:pPr lvl="3"/>
             <a:r>
-              <a:rPr lang="en-US"/>
+              <a:rPr lang="en-US" smtClean="0"/>
               <a:t>Fourth level</a:t>
             </a:r>
           </a:p>
           <a:p>
             <a:pPr lvl="4"/>
             <a:r>
-              <a:rPr lang="en-US"/>
+              <a:rPr lang="en-US" smtClean="0"/>
               <a:t>Fifth level</a:t>
             </a:r>
+            <a:endParaRPr lang="en-US"/>
           </a:p>
         </p:txBody>
       </p:sp>
@@ -470,7 +458,7 @@
           <a:p>
             <a:fld id="{5BCAD085-E8A6-8845-BD4E-CB4CCA059FC4}" type="datetimeFigureOut">
               <a:rPr lang="en-US" smtClean="0"/>
-              <a:t>3/19/2026</a:t>
+              <a:t>1/27/13</a:t>
             </a:fld>
             <a:endParaRPr lang="en-US"/>
           </a:p>
@@ -569,9 +557,10 @@
           <a:lstStyle/>
           <a:p>
             <a:r>
-              <a:rPr lang="en-US"/>
+              <a:rPr lang="en-US" smtClean="0"/>
               <a:t>Click to edit Master title style</a:t>
             </a:r>
+            <a:endParaRPr lang="en-US"/>
           </a:p>
         </p:txBody>
       </p:sp>
@@ -597,37 +586,38 @@
           <a:p>
             <a:pPr lvl="0"/>
             <a:r>
-              <a:rPr lang="en-US"/>
+              <a:rPr lang="en-US" smtClean="0"/>
               <a:t>Click to edit Master text styles</a:t>
             </a:r>
           </a:p>
           <a:p>
             <a:pPr lvl="1"/>
             <a:r>
-              <a:rPr lang="en-US"/>
+              <a:rPr lang="en-US" smtClean="0"/>
               <a:t>Second level</a:t>
             </a:r>
           </a:p>
           <a:p>
             <a:pPr lvl="2"/>
             <a:r>
-              <a:rPr lang="en-US"/>
+              <a:rPr lang="en-US" smtClean="0"/>
               <a:t>Third level</a:t>
             </a:r>
           </a:p>
           <a:p>
             <a:pPr lvl="3"/>
             <a:r>
-              <a:rPr lang="en-US"/>
+              <a:rPr lang="en-US" smtClean="0"/>
               <a:t>Fourth level</a:t>
             </a:r>
           </a:p>
           <a:p>
             <a:pPr lvl="4"/>
             <a:r>
-              <a:rPr lang="en-US"/>
+              <a:rPr lang="en-US" smtClean="0"/>
               <a:t>Fifth level</a:t>
             </a:r>
+            <a:endParaRPr lang="en-US"/>
           </a:p>
         </p:txBody>
       </p:sp>
@@ -648,7 +638,7 @@
           <a:p>
             <a:fld id="{5BCAD085-E8A6-8845-BD4E-CB4CCA059FC4}" type="datetimeFigureOut">
               <a:rPr lang="en-US" smtClean="0"/>
-              <a:t>3/19/2026</a:t>
+              <a:t>1/27/13</a:t>
             </a:fld>
             <a:endParaRPr lang="en-US"/>
           </a:p>
@@ -742,9 +732,10 @@
           <a:lstStyle/>
           <a:p>
             <a:r>
-              <a:rPr lang="en-US"/>
+              <a:rPr lang="en-US" smtClean="0"/>
               <a:t>Click to edit Master title style</a:t>
             </a:r>
+            <a:endParaRPr lang="en-US"/>
           </a:p>
         </p:txBody>
       </p:sp>
@@ -765,37 +756,38 @@
           <a:p>
             <a:pPr lvl="0"/>
             <a:r>
-              <a:rPr lang="en-US"/>
+              <a:rPr lang="en-US" smtClean="0"/>
               <a:t>Click to edit Master text styles</a:t>
             </a:r>
           </a:p>
           <a:p>
             <a:pPr lvl="1"/>
             <a:r>
-              <a:rPr lang="en-US"/>
+              <a:rPr lang="en-US" smtClean="0"/>
               <a:t>Second level</a:t>
             </a:r>
           </a:p>
           <a:p>
             <a:pPr lvl="2"/>
             <a:r>
-              <a:rPr lang="en-US"/>
+              <a:rPr lang="en-US" smtClean="0"/>
               <a:t>Third level</a:t>
             </a:r>
           </a:p>
           <a:p>
             <a:pPr lvl="3"/>
             <a:r>
-              <a:rPr lang="en-US"/>
+              <a:rPr lang="en-US" smtClean="0"/>
               <a:t>Fourth level</a:t>
             </a:r>
           </a:p>
           <a:p>
             <a:pPr lvl="4"/>
             <a:r>
-              <a:rPr lang="en-US"/>
+              <a:rPr lang="en-US" smtClean="0"/>
               <a:t>Fifth level</a:t>
             </a:r>
+            <a:endParaRPr lang="en-US"/>
           </a:p>
         </p:txBody>
       </p:sp>
@@ -816,7 +808,7 @@
           <a:p>
             <a:fld id="{5BCAD085-E8A6-8845-BD4E-CB4CCA059FC4}" type="datetimeFigureOut">
               <a:rPr lang="en-US" smtClean="0"/>
-              <a:t>3/19/2026</a:t>
+              <a:t>1/27/13</a:t>
             </a:fld>
             <a:endParaRPr lang="en-US"/>
           </a:p>
@@ -919,9 +911,10 @@
           </a:lstStyle>
           <a:p>
             <a:r>
-              <a:rPr lang="en-US"/>
+              <a:rPr lang="en-US" smtClean="0"/>
               <a:t>Click to edit Master title style</a:t>
             </a:r>
+            <a:endParaRPr lang="en-US"/>
           </a:p>
         </p:txBody>
       </p:sp>
@@ -1038,7 +1031,7 @@
           <a:p>
             <a:pPr lvl="0"/>
             <a:r>
-              <a:rPr lang="en-US"/>
+              <a:rPr lang="en-US" smtClean="0"/>
               <a:t>Click to edit Master text styles</a:t>
             </a:r>
           </a:p>
@@ -1061,7 +1054,7 @@
           <a:p>
             <a:fld id="{5BCAD085-E8A6-8845-BD4E-CB4CCA059FC4}" type="datetimeFigureOut">
               <a:rPr lang="en-US" smtClean="0"/>
-              <a:t>3/19/2026</a:t>
+              <a:t>1/27/13</a:t>
             </a:fld>
             <a:endParaRPr lang="en-US"/>
           </a:p>
@@ -1155,9 +1148,10 @@
           <a:lstStyle/>
           <a:p>
             <a:r>
-              <a:rPr lang="en-US"/>
+              <a:rPr lang="en-US" smtClean="0"/>
               <a:t>Click to edit Master title style</a:t>
             </a:r>
+            <a:endParaRPr lang="en-US"/>
           </a:p>
         </p:txBody>
       </p:sp>
@@ -1211,37 +1205,38 @@
           <a:p>
             <a:pPr lvl="0"/>
             <a:r>
-              <a:rPr lang="en-US"/>
+              <a:rPr lang="en-US" smtClean="0"/>
               <a:t>Click to edit Master text styles</a:t>
             </a:r>
           </a:p>
           <a:p>
             <a:pPr lvl="1"/>
             <a:r>
-              <a:rPr lang="en-US"/>
+              <a:rPr lang="en-US" smtClean="0"/>
               <a:t>Second level</a:t>
             </a:r>
           </a:p>
           <a:p>
             <a:pPr lvl="2"/>
             <a:r>
-              <a:rPr lang="en-US"/>
+              <a:rPr lang="en-US" smtClean="0"/>
               <a:t>Third level</a:t>
             </a:r>
           </a:p>
           <a:p>
             <a:pPr lvl="3"/>
             <a:r>
-              <a:rPr lang="en-US"/>
+              <a:rPr lang="en-US" smtClean="0"/>
               <a:t>Fourth level</a:t>
             </a:r>
           </a:p>
           <a:p>
             <a:pPr lvl="4"/>
             <a:r>
-              <a:rPr lang="en-US"/>
+              <a:rPr lang="en-US" smtClean="0"/>
               <a:t>Fifth level</a:t>
             </a:r>
+            <a:endParaRPr lang="en-US"/>
           </a:p>
         </p:txBody>
       </p:sp>
@@ -1295,37 +1290,38 @@
           <a:p>
             <a:pPr lvl="0"/>
             <a:r>
-              <a:rPr lang="en-US"/>
+              <a:rPr lang="en-US" smtClean="0"/>
               <a:t>Click to edit Master text styles</a:t>
             </a:r>
           </a:p>
           <a:p>
             <a:pPr lvl="1"/>
             <a:r>
-              <a:rPr lang="en-US"/>
+              <a:rPr lang="en-US" smtClean="0"/>
               <a:t>Second level</a:t>
             </a:r>
           </a:p>
           <a:p>
             <a:pPr lvl="2"/>
             <a:r>
-              <a:rPr lang="en-US"/>
+              <a:rPr lang="en-US" smtClean="0"/>
               <a:t>Third level</a:t>
             </a:r>
           </a:p>
           <a:p>
             <a:pPr lvl="3"/>
             <a:r>
-              <a:rPr lang="en-US"/>
+              <a:rPr lang="en-US" smtClean="0"/>
               <a:t>Fourth level</a:t>
             </a:r>
           </a:p>
           <a:p>
             <a:pPr lvl="4"/>
             <a:r>
-              <a:rPr lang="en-US"/>
+              <a:rPr lang="en-US" smtClean="0"/>
               <a:t>Fifth level</a:t>
             </a:r>
+            <a:endParaRPr lang="en-US"/>
           </a:p>
         </p:txBody>
       </p:sp>
@@ -1346,7 +1342,7 @@
           <a:p>
             <a:fld id="{5BCAD085-E8A6-8845-BD4E-CB4CCA059FC4}" type="datetimeFigureOut">
               <a:rPr lang="en-US" smtClean="0"/>
-              <a:t>3/19/2026</a:t>
+              <a:t>1/27/13</a:t>
             </a:fld>
             <a:endParaRPr lang="en-US"/>
           </a:p>
@@ -1444,9 +1440,10 @@
           </a:lstStyle>
           <a:p>
             <a:r>
-              <a:rPr lang="en-US"/>
+              <a:rPr lang="en-US" smtClean="0"/>
               <a:t>Click to edit Master title style</a:t>
             </a:r>
+            <a:endParaRPr lang="en-US"/>
           </a:p>
         </p:txBody>
       </p:sp>
@@ -1509,7 +1506,7 @@
           <a:p>
             <a:pPr lvl="0"/>
             <a:r>
-              <a:rPr lang="en-US"/>
+              <a:rPr lang="en-US" smtClean="0"/>
               <a:t>Click to edit Master text styles</a:t>
             </a:r>
           </a:p>
@@ -1565,37 +1562,38 @@
           <a:p>
             <a:pPr lvl="0"/>
             <a:r>
-              <a:rPr lang="en-US"/>
+              <a:rPr lang="en-US" smtClean="0"/>
               <a:t>Click to edit Master text styles</a:t>
             </a:r>
           </a:p>
           <a:p>
             <a:pPr lvl="1"/>
             <a:r>
-              <a:rPr lang="en-US"/>
+              <a:rPr lang="en-US" smtClean="0"/>
               <a:t>Second level</a:t>
             </a:r>
           </a:p>
           <a:p>
             <a:pPr lvl="2"/>
             <a:r>
-              <a:rPr lang="en-US"/>
+              <a:rPr lang="en-US" smtClean="0"/>
               <a:t>Third level</a:t>
             </a:r>
           </a:p>
           <a:p>
             <a:pPr lvl="3"/>
             <a:r>
-              <a:rPr lang="en-US"/>
+              <a:rPr lang="en-US" smtClean="0"/>
               <a:t>Fourth level</a:t>
             </a:r>
           </a:p>
           <a:p>
             <a:pPr lvl="4"/>
             <a:r>
-              <a:rPr lang="en-US"/>
+              <a:rPr lang="en-US" smtClean="0"/>
               <a:t>Fifth level</a:t>
             </a:r>
+            <a:endParaRPr lang="en-US"/>
           </a:p>
         </p:txBody>
       </p:sp>
@@ -1658,7 +1656,7 @@
           <a:p>
             <a:pPr lvl="0"/>
             <a:r>
-              <a:rPr lang="en-US"/>
+              <a:rPr lang="en-US" smtClean="0"/>
               <a:t>Click to edit Master text styles</a:t>
             </a:r>
           </a:p>
@@ -1714,37 +1712,38 @@
           <a:p>
             <a:pPr lvl="0"/>
             <a:r>
-              <a:rPr lang="en-US"/>
+              <a:rPr lang="en-US" smtClean="0"/>
               <a:t>Click to edit Master text styles</a:t>
             </a:r>
           </a:p>
           <a:p>
             <a:pPr lvl="1"/>
             <a:r>
-              <a:rPr lang="en-US"/>
+              <a:rPr lang="en-US" smtClean="0"/>
               <a:t>Second level</a:t>
             </a:r>
           </a:p>
           <a:p>
             <a:pPr lvl="2"/>
             <a:r>
-              <a:rPr lang="en-US"/>
+              <a:rPr lang="en-US" smtClean="0"/>
               <a:t>Third level</a:t>
             </a:r>
           </a:p>
           <a:p>
             <a:pPr lvl="3"/>
             <a:r>
-              <a:rPr lang="en-US"/>
+              <a:rPr lang="en-US" smtClean="0"/>
               <a:t>Fourth level</a:t>
             </a:r>
           </a:p>
           <a:p>
             <a:pPr lvl="4"/>
             <a:r>
-              <a:rPr lang="en-US"/>
+              <a:rPr lang="en-US" smtClean="0"/>
               <a:t>Fifth level</a:t>
             </a:r>
+            <a:endParaRPr lang="en-US"/>
           </a:p>
         </p:txBody>
       </p:sp>
@@ -1765,7 +1764,7 @@
           <a:p>
             <a:fld id="{5BCAD085-E8A6-8845-BD4E-CB4CCA059FC4}" type="datetimeFigureOut">
               <a:rPr lang="en-US" smtClean="0"/>
-              <a:t>3/19/2026</a:t>
+              <a:t>1/27/13</a:t>
             </a:fld>
             <a:endParaRPr lang="en-US"/>
           </a:p>
@@ -1859,9 +1858,10 @@
           <a:lstStyle/>
           <a:p>
             <a:r>
-              <a:rPr lang="en-US"/>
+              <a:rPr lang="en-US" smtClean="0"/>
               <a:t>Click to edit Master title style</a:t>
             </a:r>
+            <a:endParaRPr lang="en-US"/>
           </a:p>
         </p:txBody>
       </p:sp>
@@ -1882,7 +1882,7 @@
           <a:p>
             <a:fld id="{5BCAD085-E8A6-8845-BD4E-CB4CCA059FC4}" type="datetimeFigureOut">
               <a:rPr lang="en-US" smtClean="0"/>
-              <a:t>3/19/2026</a:t>
+              <a:t>1/27/13</a:t>
             </a:fld>
             <a:endParaRPr lang="en-US"/>
           </a:p>
@@ -1977,7 +1977,7 @@
           <a:p>
             <a:fld id="{5BCAD085-E8A6-8845-BD4E-CB4CCA059FC4}" type="datetimeFigureOut">
               <a:rPr lang="en-US" smtClean="0"/>
-              <a:t>3/19/2026</a:t>
+              <a:t>1/27/13</a:t>
             </a:fld>
             <a:endParaRPr lang="en-US"/>
           </a:p>
@@ -2080,9 +2080,10 @@
           </a:lstStyle>
           <a:p>
             <a:r>
-              <a:rPr lang="en-US"/>
+              <a:rPr lang="en-US" smtClean="0"/>
               <a:t>Click to edit Master title style</a:t>
             </a:r>
+            <a:endParaRPr lang="en-US"/>
           </a:p>
         </p:txBody>
       </p:sp>
@@ -2136,37 +2137,38 @@
           <a:p>
             <a:pPr lvl="0"/>
             <a:r>
-              <a:rPr lang="en-US"/>
+              <a:rPr lang="en-US" smtClean="0"/>
               <a:t>Click to edit Master text styles</a:t>
             </a:r>
           </a:p>
           <a:p>
             <a:pPr lvl="1"/>
             <a:r>
-              <a:rPr lang="en-US"/>
+              <a:rPr lang="en-US" smtClean="0"/>
               <a:t>Second level</a:t>
             </a:r>
           </a:p>
           <a:p>
             <a:pPr lvl="2"/>
             <a:r>
-              <a:rPr lang="en-US"/>
+              <a:rPr lang="en-US" smtClean="0"/>
               <a:t>Third level</a:t>
             </a:r>
           </a:p>
           <a:p>
             <a:pPr lvl="3"/>
             <a:r>
-              <a:rPr lang="en-US"/>
+              <a:rPr lang="en-US" smtClean="0"/>
               <a:t>Fourth level</a:t>
             </a:r>
           </a:p>
           <a:p>
             <a:pPr lvl="4"/>
             <a:r>
-              <a:rPr lang="en-US"/>
+              <a:rPr lang="en-US" smtClean="0"/>
               <a:t>Fifth level</a:t>
             </a:r>
+            <a:endParaRPr lang="en-US"/>
           </a:p>
         </p:txBody>
       </p:sp>
@@ -2229,7 +2231,7 @@
           <a:p>
             <a:pPr lvl="0"/>
             <a:r>
-              <a:rPr lang="en-US"/>
+              <a:rPr lang="en-US" smtClean="0"/>
               <a:t>Click to edit Master text styles</a:t>
             </a:r>
           </a:p>
@@ -2252,7 +2254,7 @@
           <a:p>
             <a:fld id="{5BCAD085-E8A6-8845-BD4E-CB4CCA059FC4}" type="datetimeFigureOut">
               <a:rPr lang="en-US" smtClean="0"/>
-              <a:t>3/19/2026</a:t>
+              <a:t>1/27/13</a:t>
             </a:fld>
             <a:endParaRPr lang="en-US"/>
           </a:p>
@@ -2355,9 +2357,10 @@
           </a:lstStyle>
           <a:p>
             <a:r>
-              <a:rPr lang="en-US"/>
+              <a:rPr lang="en-US" smtClean="0"/>
               <a:t>Click to edit Master title style</a:t>
             </a:r>
+            <a:endParaRPr lang="en-US"/>
           </a:p>
         </p:txBody>
       </p:sp>
@@ -2481,7 +2484,7 @@
           <a:p>
             <a:pPr lvl="0"/>
             <a:r>
-              <a:rPr lang="en-US"/>
+              <a:rPr lang="en-US" smtClean="0"/>
               <a:t>Click to edit Master text styles</a:t>
             </a:r>
           </a:p>
@@ -2504,7 +2507,7 @@
           <a:p>
             <a:fld id="{5BCAD085-E8A6-8845-BD4E-CB4CCA059FC4}" type="datetimeFigureOut">
               <a:rPr lang="en-US" smtClean="0"/>
-              <a:t>3/19/2026</a:t>
+              <a:t>1/27/13</a:t>
             </a:fld>
             <a:endParaRPr lang="en-US"/>
           </a:p>
@@ -2613,9 +2616,10 @@
           <a:lstStyle/>
           <a:p>
             <a:r>
-              <a:rPr lang="en-US"/>
+              <a:rPr lang="en-US" smtClean="0"/>
               <a:t>Click to edit Master title style</a:t>
             </a:r>
+            <a:endParaRPr lang="en-US"/>
           </a:p>
         </p:txBody>
       </p:sp>
@@ -2646,37 +2650,38 @@
           <a:p>
             <a:pPr lvl="0"/>
             <a:r>
-              <a:rPr lang="en-US"/>
+              <a:rPr lang="en-US" smtClean="0"/>
               <a:t>Click to edit Master text styles</a:t>
             </a:r>
           </a:p>
           <a:p>
             <a:pPr lvl="1"/>
             <a:r>
-              <a:rPr lang="en-US"/>
+              <a:rPr lang="en-US" smtClean="0"/>
               <a:t>Second level</a:t>
             </a:r>
           </a:p>
           <a:p>
             <a:pPr lvl="2"/>
             <a:r>
-              <a:rPr lang="en-US"/>
+              <a:rPr lang="en-US" smtClean="0"/>
               <a:t>Third level</a:t>
             </a:r>
           </a:p>
           <a:p>
             <a:pPr lvl="3"/>
             <a:r>
-              <a:rPr lang="en-US"/>
+              <a:rPr lang="en-US" smtClean="0"/>
               <a:t>Fourth level</a:t>
             </a:r>
           </a:p>
           <a:p>
             <a:pPr lvl="4"/>
             <a:r>
-              <a:rPr lang="en-US"/>
+              <a:rPr lang="en-US" smtClean="0"/>
               <a:t>Fifth level</a:t>
             </a:r>
+            <a:endParaRPr lang="en-US"/>
           </a:p>
         </p:txBody>
       </p:sp>
@@ -2715,7 +2720,7 @@
           <a:p>
             <a:fld id="{5BCAD085-E8A6-8845-BD4E-CB4CCA059FC4}" type="datetimeFigureOut">
               <a:rPr lang="en-US" smtClean="0"/>
-              <a:t>3/19/2026</a:t>
+              <a:t>1/27/13</a:t>
             </a:fld>
             <a:endParaRPr lang="en-US"/>
           </a:p>
@@ -3074,7 +3079,7 @@
 </file>
 
 <file path=ppt/slides/slide1.xml><?xml version="1.0" encoding="utf-8"?>
-<p:sld xmlns:a="http://schemas.openxmlformats.org/drawingml/2006/main" xmlns:r="http://schemas.openxmlformats.org/officeDocument/2006/relationships" xmlns:p="http://schemas.openxmlformats.org/presentationml/2006/main">
+<p:sld xmlns:a="http://schemas.openxmlformats.org/drawingml/2006/main" xmlns:p="http://schemas.openxmlformats.org/presentationml/2006/main" xmlns:r="http://schemas.openxmlformats.org/officeDocument/2006/relationships">
   <p:cSld>
     <p:spTree>
       <p:nvGrpSpPr>
@@ -3082,14 +3087,7 @@
         <p:cNvGrpSpPr/>
         <p:nvPr/>
       </p:nvGrpSpPr>
-      <p:grpSpPr>
-        <a:xfrm>
-          <a:off x="0" y="0"/>
-          <a:ext cx="0" cy="0"/>
-          <a:chOff x="0" y="0"/>
-          <a:chExt cx="0" cy="0"/>
-        </a:xfrm>
-      </p:grpSpPr>
+      <p:grpSpPr/>
       <p:sp>
         <p:nvSpPr>
           <p:cNvPr id="2" name="Rectangle 1"/>
@@ -3130,7 +3128,6 @@
           <a:lstStyle/>
           <a:p>
             <a:pPr algn="ctr"/>
-            <a:endParaRPr/>
           </a:p>
         </p:txBody>
       </p:sp>
@@ -3174,7 +3171,6 @@
           <a:lstStyle/>
           <a:p>
             <a:pPr algn="ctr"/>
-            <a:endParaRPr/>
           </a:p>
         </p:txBody>
       </p:sp>
@@ -3207,7 +3203,7 @@
                   <a:srgbClr val="FFFFFF"/>
                 </a:solidFill>
               </a:rPr>
-              <a:t>UTILITICS — Azure Databricks Data Sharing Platform  |  Local POC — End-to-End Architecture</a:t>
+              <a:t>UTILITICS — Azure Databricks Data Sharing Platform  |  Part 1 Complete + Part 2 Azure In Progress</a:t>
             </a:r>
           </a:p>
         </p:txBody>
@@ -3241,7 +3237,7 @@
                   <a:srgbClr val="F7C948"/>
                 </a:solidFill>
               </a:rPr>
-              <a:t>Status: Part 1 COMPLETE  ✔</a:t>
+              <a:t>Part 1 DONE  |  Part 2 IN PROGRESS</a:t>
             </a:r>
           </a:p>
         </p:txBody>
@@ -3286,7 +3282,6 @@
           <a:lstStyle/>
           <a:p>
             <a:pPr algn="ctr"/>
-            <a:endParaRPr/>
           </a:p>
         </p:txBody>
       </p:sp>
@@ -3330,7 +3325,6 @@
           <a:lstStyle/>
           <a:p>
             <a:pPr algn="ctr"/>
-            <a:endParaRPr/>
           </a:p>
         </p:txBody>
       </p:sp>
@@ -3363,7 +3357,7 @@
                   <a:srgbClr val="FFFFFF"/>
                 </a:solidFill>
               </a:rPr>
-              <a:t>① DATA SOURCES</a:t>
+              <a:t>① DATA SOURCES  (3 formats)</a:t>
             </a:r>
           </a:p>
         </p:txBody>
@@ -3396,7 +3390,7 @@
                   <a:srgbClr val="58A6FF"/>
                 </a:solidFill>
               </a:rPr>
-              <a:t>Time Series (Parquet)</a:t>
+              <a:t>Time Series (CSV file drops)</a:t>
             </a:r>
           </a:p>
           <a:p>
@@ -3406,7 +3400,7 @@
                   <a:srgbClr val="C9D1D9"/>
                 </a:solidFill>
               </a:rPr>
-              <a:t>  500 meters × 7 days × 48 readings</a:t>
+              <a:t>  500 meters x 7 days x 48 readings</a:t>
             </a:r>
           </a:p>
           <a:p>
@@ -3416,15 +3410,18 @@
                   <a:srgbClr val="C9D1D9"/>
                 </a:solidFill>
               </a:rPr>
-              <a:t>  → 168,000 records  |  lake/raw/timeseries/</a:t>
-            </a:r>
-          </a:p>
-          <a:p>
-            <a:endParaRPr sz="800" b="0" i="0">
-              <a:solidFill>
-                <a:srgbClr val="C9D1D9"/>
-              </a:solidFill>
-            </a:endParaRPr>
+              <a:t>  168,000 records  |  data/lake/sources/timeseries_csv/</a:t>
+            </a:r>
+          </a:p>
+          <a:p>
+            <a:r>
+              <a:rPr sz="800" b="0" i="0">
+                <a:solidFill>
+                  <a:srgbClr val="C9D1D9"/>
+                </a:solidFill>
+              </a:rPr>
+              <a:t/>
+            </a:r>
           </a:p>
           <a:p>
             <a:r>
@@ -3443,7 +3440,7 @@
                   <a:srgbClr val="C9D1D9"/>
                 </a:solidFill>
               </a:rPr>
-              <a:t>  2,000 assets × 7 snapshots</a:t>
+              <a:t>  2,000 assets x 7 snapshots</a:t>
             </a:r>
           </a:p>
           <a:p>
@@ -3453,7 +3450,7 @@
                   <a:srgbClr val="C9D1D9"/>
                 </a:solidFill>
               </a:rPr>
-              <a:t>  → 14,000 records  |  lake/sources/assets.db</a:t>
+              <a:t>  14,000 records  |  data/lake/sources/assets.db</a:t>
             </a:r>
           </a:p>
           <a:p>
@@ -3467,11 +3464,14 @@
             </a:r>
           </a:p>
           <a:p>
-            <a:endParaRPr sz="800" b="0" i="0">
-              <a:solidFill>
-                <a:srgbClr val="C9D1D9"/>
-              </a:solidFill>
-            </a:endParaRPr>
+            <a:r>
+              <a:rPr sz="800" b="0" i="0">
+                <a:solidFill>
+                  <a:srgbClr val="C9D1D9"/>
+                </a:solidFill>
+              </a:rPr>
+              <a:t/>
+            </a:r>
           </a:p>
           <a:p>
             <a:r>
@@ -3480,7 +3480,7 @@
                   <a:srgbClr val="58A6FF"/>
                 </a:solidFill>
               </a:rPr>
-              <a:t>Vendor Forecasts (Parquet)</a:t>
+              <a:t>Demand Forecasts (Parquet)</a:t>
             </a:r>
           </a:p>
           <a:p>
@@ -3490,7 +3490,7 @@
                   <a:srgbClr val="C9D1D9"/>
                 </a:solidFill>
               </a:rPr>
-              <a:t>  500 forecasts × 168 hourly points</a:t>
+              <a:t>  500 forecasts x 168 hourly points</a:t>
             </a:r>
           </a:p>
           <a:p>
@@ -3500,7 +3500,7 @@
                   <a:srgbClr val="C9D1D9"/>
                 </a:solidFill>
               </a:rPr>
-              <a:t>  → 84,000 records  |  lake/raw/files/</a:t>
+              <a:t>  84,000 records  |  data/lake/sources/files_parquet/</a:t>
             </a:r>
           </a:p>
         </p:txBody>
@@ -3545,7 +3545,6 @@
           <a:lstStyle/>
           <a:p>
             <a:pPr algn="ctr"/>
-            <a:endParaRPr/>
           </a:p>
         </p:txBody>
       </p:sp>
@@ -3589,7 +3588,6 @@
           <a:lstStyle/>
           <a:p>
             <a:pPr algn="ctr"/>
-            <a:endParaRPr/>
           </a:p>
         </p:txBody>
       </p:sp>
@@ -3665,7 +3663,7 @@
                   <a:srgbClr val="C9D1D9"/>
                 </a:solidFill>
               </a:rPr>
-              <a:t>    Synthetic meter + asset + forecast data  →  266K total records</a:t>
+              <a:t>    Synthetic meter + asset + forecast  -&gt;  266K records (CSV/SQLite/Parquet)</a:t>
             </a:r>
           </a:p>
           <a:p>
@@ -3685,7 +3683,7 @@
                   <a:srgbClr val="C9D1D9"/>
                 </a:solidFill>
               </a:rPr>
-              <a:t>    Raw → Bronze Delta  |  168K + 14K + 84K  |  Match: 100%</a:t>
+              <a:t>    Raw -&gt; Bronze Delta  |  168K + 14K + 84K  |  Match: 100%</a:t>
             </a:r>
           </a:p>
           <a:p>
@@ -3735,7 +3733,7 @@
                   <a:srgbClr val="C9D1D9"/>
                 </a:solidFill>
               </a:rPr>
-              <a:t>    network_assets / forecast_summary  →  6,760 records</a:t>
+              <a:t>    network_assets / forecast_summary  -&gt;  6,760 records</a:t>
             </a:r>
           </a:p>
           <a:p>
@@ -3755,27 +3753,7 @@
                   <a:srgbClr val="C9D1D9"/>
                 </a:solidFill>
               </a:rPr>
-              <a:t>    19/19 checks PASS  (Bronze→Silver drop, Gold counts,</a:t>
-            </a:r>
-          </a:p>
-          <a:p>
-            <a:r>
-              <a:rPr sz="800" b="0" i="0">
-                <a:solidFill>
-                  <a:srgbClr val="C9D1D9"/>
-                </a:solidFill>
-              </a:rPr>
-              <a:t>    quality rules, Delta health, SQLite source checks)</a:t>
-            </a:r>
-          </a:p>
-          <a:p>
-            <a:r>
-              <a:rPr sz="800" b="0" i="0">
-                <a:solidFill>
-                  <a:srgbClr val="C9D1D9"/>
-                </a:solidFill>
-              </a:rPr>
-              <a:t>    Full run elapsed: ~5 minutes</a:t>
+              <a:t>    19/19 checks PASS  |  Full run: ~234 seconds</a:t>
             </a:r>
           </a:p>
         </p:txBody>
@@ -3820,7 +3798,6 @@
           <a:lstStyle/>
           <a:p>
             <a:pPr algn="ctr"/>
-            <a:endParaRPr/>
           </a:p>
         </p:txBody>
       </p:sp>
@@ -3864,7 +3841,6 @@
           <a:lstStyle/>
           <a:p>
             <a:pPr algn="ctr"/>
-            <a:endParaRPr/>
           </a:p>
         </p:txBody>
       </p:sp>
@@ -3897,7 +3873,7 @@
                   <a:srgbClr val="FFFFFF"/>
                 </a:solidFill>
               </a:rPr>
-              <a:t>③ DELTA SHARING  (Section 13)</a:t>
+              <a:t>③ DELTA SHARING</a:t>
             </a:r>
           </a:p>
         </p:txBody>
@@ -3930,7 +3906,7 @@
                   <a:srgbClr val="3FB950"/>
                 </a:solidFill>
               </a:rPr>
-              <a:t>Option A — Python Simulation  ✔</a:t>
+              <a:t>Option A — Python Simulation  [DONE]</a:t>
             </a:r>
           </a:p>
           <a:p>
@@ -3984,11 +3960,14 @@
             </a:r>
           </a:p>
           <a:p>
-            <a:endParaRPr sz="800" b="0" i="0">
-              <a:solidFill>
-                <a:srgbClr val="C9D1D9"/>
-              </a:solidFill>
-            </a:endParaRPr>
+            <a:r>
+              <a:rPr sz="800" b="0" i="0">
+                <a:solidFill>
+                  <a:srgbClr val="C9D1D9"/>
+                </a:solidFill>
+              </a:rPr>
+              <a:t/>
+            </a:r>
           </a:p>
           <a:p>
             <a:r>
@@ -3997,7 +3976,7 @@
                   <a:srgbClr val="58A6FF"/>
                 </a:solidFill>
               </a:rPr>
-              <a:t>Option B — OSS Delta Sharing Server  (code ready)</a:t>
+              <a:t>Option B — Unity Catalog (Part 2)</a:t>
             </a:r>
           </a:p>
           <a:p>
@@ -4007,7 +3986,7 @@
                   <a:srgbClr val="C9D1D9"/>
                 </a:solidFill>
               </a:rPr>
-              <a:t>  Real delta-sharing-server.jar + Python client</a:t>
+              <a:t>  Azure Databricks Premium + Unity Catalog provisioned</a:t>
             </a:r>
           </a:p>
           <a:p>
@@ -4017,7 +3996,7 @@
                   <a:srgbClr val="C9D1D9"/>
                 </a:solidFill>
               </a:rPr>
-              <a:t>  server_config.yaml + recipient_profile.json configured</a:t>
+              <a:t>  Real Delta Sharing via Unity Catalog — NEXT STEP</a:t>
             </a:r>
           </a:p>
           <a:p>
@@ -4027,7 +4006,7 @@
                   <a:srgbClr val="C9D1D9"/>
                 </a:solidFill>
               </a:rPr>
-              <a:t>  Requires: download JAR → place in delta_sharing/</a:t>
+              <a:t>  Vendor gets read-only token  |  Full audit trail</a:t>
             </a:r>
           </a:p>
         </p:txBody>
@@ -4072,7 +4051,6 @@
           <a:lstStyle/>
           <a:p>
             <a:pPr algn="ctr"/>
-            <a:endParaRPr/>
           </a:p>
         </p:txBody>
       </p:sp>
@@ -4116,7 +4094,6 @@
           <a:lstStyle/>
           <a:p>
             <a:pPr algn="ctr"/>
-            <a:endParaRPr/>
           </a:p>
         </p:txBody>
       </p:sp>
@@ -4149,7 +4126,7 @@
                   <a:srgbClr val="FFFFFF"/>
                 </a:solidFill>
               </a:rPr>
-              <a:t>④ DATABRICKS PORT + RUNTIME FLAG  (Section 14)</a:t>
+              <a:t>④ CI/CD + NIGHTLY BUILD  [DONE]</a:t>
             </a:r>
           </a:p>
         </p:txBody>
@@ -4182,7 +4159,7 @@
                   <a:srgbClr val="F7C948"/>
                 </a:solidFill>
               </a:rPr>
-              <a:t>run.py  —  Unified Launcher</a:t>
+              <a:t>GitHub Actions CI  (.github/workflows/ci.yml)</a:t>
             </a:r>
           </a:p>
           <a:p>
@@ -4192,7 +4169,7 @@
                   <a:srgbClr val="C9D1D9"/>
                 </a:solidFill>
               </a:rPr>
-              <a:t>  --local   → runs local PySpark via subprocess</a:t>
+              <a:t>  check_syntax.py: 25 files, syntax + 6 secret patterns</a:t>
             </a:r>
           </a:p>
           <a:p>
@@ -4202,7 +4179,7 @@
                   <a:srgbClr val="C9D1D9"/>
                 </a:solidFill>
               </a:rPr>
-              <a:t>  --cloud   → submits to Databricks REST API</a:t>
+              <a:t>  Skips: ci/, notebooks/databricks/, vendor delta-sharing</a:t>
             </a:r>
           </a:p>
           <a:p>
@@ -4212,7 +4189,17 @@
                   <a:srgbClr val="C9D1D9"/>
                 </a:solidFill>
               </a:rPr>
-              <a:t>  --config  → shows RUNTIME, token, workspace URL</a:t>
+              <a:t/>
+            </a:r>
+          </a:p>
+          <a:p>
+            <a:r>
+              <a:rPr sz="800" b="1" i="0">
+                <a:solidFill>
+                  <a:srgbClr val="F7C948"/>
+                </a:solidFill>
+              </a:rPr>
+              <a:t>GitHub Actions CD  (.github/workflows/cd.yml)</a:t>
             </a:r>
           </a:p>
           <a:p>
@@ -4222,15 +4209,38 @@
                   <a:srgbClr val="C9D1D9"/>
                 </a:solidFill>
               </a:rPr>
-              <a:t>  --status  → checks last Databricks run</a:t>
-            </a:r>
-          </a:p>
-          <a:p>
-            <a:endParaRPr sz="800" b="0" i="0">
-              <a:solidFill>
-                <a:srgbClr val="C9D1D9"/>
-              </a:solidFill>
-            </a:endParaRPr>
+              <a:t>  Triggers after CI passes on push to main</a:t>
+            </a:r>
+          </a:p>
+          <a:p>
+            <a:r>
+              <a:rPr sz="800" b="0" i="0">
+                <a:solidFill>
+                  <a:srgbClr val="C9D1D9"/>
+                </a:solidFill>
+              </a:rPr>
+              <a:t>  upload_notebooks.py -&gt; 9 notebooks auto-deployed</a:t>
+            </a:r>
+          </a:p>
+          <a:p>
+            <a:r>
+              <a:rPr sz="800" b="0" i="0">
+                <a:solidFill>
+                  <a:srgbClr val="C9D1D9"/>
+                </a:solidFill>
+              </a:rPr>
+              <a:t>  Requires: DATABRICKS_HOST + DATABRICKS_TOKEN secrets</a:t>
+            </a:r>
+          </a:p>
+          <a:p>
+            <a:r>
+              <a:rPr sz="800" b="0" i="0">
+                <a:solidFill>
+                  <a:srgbClr val="C9D1D9"/>
+                </a:solidFill>
+              </a:rPr>
+              <a:t/>
+            </a:r>
           </a:p>
           <a:p>
             <a:r>
@@ -4239,7 +4249,7 @@
                   <a:srgbClr val="F7C948"/>
                 </a:solidFill>
               </a:rPr>
-              <a:t>RUNTIME flag in pipeline_config.py</a:t>
+              <a:t>Nightly Build  (ci/nightly_build.py)</a:t>
             </a:r>
           </a:p>
           <a:p>
@@ -4249,7 +4259,7 @@
                   <a:srgbClr val="C9D1D9"/>
                 </a:solidFill>
               </a:rPr>
-              <a:t>  "local"      — Windows PySpark (default)</a:t>
+              <a:t>  Windows Task Scheduler at 2AM daily</a:t>
             </a:r>
           </a:p>
           <a:p>
@@ -4259,24 +4269,7 @@
                   <a:srgbClr val="C9D1D9"/>
                 </a:solidFill>
               </a:rPr>
-              <a:t>  "databricks" — Community Edition via REST API</a:t>
-            </a:r>
-          </a:p>
-          <a:p>
-            <a:endParaRPr sz="800" b="0" i="0">
-              <a:solidFill>
-                <a:srgbClr val="C9D1D9"/>
-              </a:solidFill>
-            </a:endParaRPr>
-          </a:p>
-          <a:p>
-            <a:r>
-              <a:rPr sz="800" b="1" i="0">
-                <a:solidFill>
-                  <a:srgbClr val="F7C948"/>
-                </a:solidFill>
-              </a:rPr>
-              <a:t>notebooks/databricks/  (7 notebooks)</a:t>
+              <a:t>  Runs CI + full pipeline -&gt; WhatsApp alert via Twilio</a:t>
             </a:r>
           </a:p>
           <a:p>
@@ -4286,27 +4279,7 @@
                   <a:srgbClr val="C9D1D9"/>
                 </a:solidFill>
               </a:rPr>
-              <a:t>  DBFS paths  |  dbutils.notebook.run()</a:t>
-            </a:r>
-          </a:p>
-          <a:p>
-            <a:r>
-              <a:rPr sz="800" b="0" i="0">
-                <a:solidFill>
-                  <a:srgbClr val="C9D1D9"/>
-                </a:solidFill>
-              </a:rPr>
-              <a:t>  dbutils.notebook.exit("SUCCESS"/"FAILED")</a:t>
-            </a:r>
-          </a:p>
-          <a:p>
-            <a:r>
-              <a:rPr sz="800" b="0" i="0">
-                <a:solidFill>
-                  <a:srgbClr val="C9D1D9"/>
-                </a:solidFill>
-              </a:rPr>
-              <a:t>  Snapshot → CSV on DBFS (no SQLite on CE)</a:t>
+              <a:t>  setup_nightly.bat registers scheduled task</a:t>
             </a:r>
           </a:p>
         </p:txBody>
@@ -4351,7 +4324,6 @@
           <a:lstStyle/>
           <a:p>
             <a:pPr algn="ctr"/>
-            <a:endParaRPr/>
           </a:p>
         </p:txBody>
       </p:sp>
@@ -4395,7 +4367,6 @@
           <a:lstStyle/>
           <a:p>
             <a:pPr algn="ctr"/>
-            <a:endParaRPr/>
           </a:p>
         </p:txBody>
       </p:sp>
@@ -4428,7 +4399,7 @@
                   <a:srgbClr val="FFFFFF"/>
                 </a:solidFill>
               </a:rPr>
-              <a:t>⑤ CHATOPS — WhatsApp Pipeline Control  (LIVE ✔)</a:t>
+              <a:t>⑤ CHATOPS — WhatsApp Pipeline Control  [LIVE]</a:t>
             </a:r>
           </a:p>
         </p:txBody>
@@ -4461,15 +4432,18 @@
                   <a:srgbClr val="58A6FF"/>
                 </a:solidFill>
               </a:rPr>
-              <a:t>Flow:  WhatsApp → Twilio → ngrok → FastAPI → Claude AI → Pipeline</a:t>
-            </a:r>
-          </a:p>
-          <a:p>
-            <a:endParaRPr sz="800" b="1" i="0">
-              <a:solidFill>
-                <a:srgbClr val="58A6FF"/>
-              </a:solidFill>
-            </a:endParaRPr>
+              <a:t>Flow:  WhatsApp -&gt; Twilio -&gt; ngrok -&gt; FastAPI -&gt; Claude AI -&gt; Pipeline</a:t>
+            </a:r>
+          </a:p>
+          <a:p>
+            <a:r>
+              <a:rPr sz="800" b="0" i="0">
+                <a:solidFill>
+                  <a:srgbClr val="C9D1D9"/>
+                </a:solidFill>
+              </a:rPr>
+              <a:t/>
+            </a:r>
           </a:p>
           <a:p>
             <a:r>
@@ -4502,11 +4476,14 @@
             </a:r>
           </a:p>
           <a:p>
-            <a:endParaRPr sz="800" b="0" i="0">
-              <a:solidFill>
-                <a:srgbClr val="C9D1D9"/>
-              </a:solidFill>
-            </a:endParaRPr>
+            <a:r>
+              <a:rPr sz="800" b="0" i="0">
+                <a:solidFill>
+                  <a:srgbClr val="C9D1D9"/>
+                </a:solidFill>
+              </a:rPr>
+              <a:t/>
+            </a:r>
           </a:p>
           <a:p>
             <a:r>
@@ -4515,7 +4492,7 @@
                   <a:srgbClr val="F7C948"/>
                 </a:solidFill>
               </a:rPr>
-              <a:t>automation/claude_tools.py  (6 tools)</a:t>
+              <a:t>automation/claude_tools.py  (7 tools)</a:t>
             </a:r>
           </a:p>
           <a:p>
@@ -4525,7 +4502,7 @@
                   <a:srgbClr val="C9D1D9"/>
                 </a:solidFill>
               </a:rPr>
-              <a:t>  run_pipeline   run_step   run_sharing</a:t>
+              <a:t>  run_pipeline    run_step      run_sharing</a:t>
             </a:r>
           </a:p>
           <a:p>
@@ -4535,51 +4512,37 @@
                   <a:srgbClr val="C9D1D9"/>
                 </a:solidFill>
               </a:rPr>
-              <a:t>  get_status     get_runtime   set_runtime</a:t>
-            </a:r>
-          </a:p>
-          <a:p>
-            <a:endParaRPr sz="800" b="0" i="0">
-              <a:solidFill>
-                <a:srgbClr val="C9D1D9"/>
-              </a:solidFill>
-            </a:endParaRPr>
+              <a:t>  get_status      get_runtime   set_runtime</a:t>
+            </a:r>
+          </a:p>
+          <a:p>
+            <a:r>
+              <a:rPr sz="800" b="0" i="0">
+                <a:solidFill>
+                  <a:srgbClr val="C9D1D9"/>
+                </a:solidFill>
+              </a:rPr>
+              <a:t>  run_ci  (NEW: triggers CI check from WhatsApp)</a:t>
+            </a:r>
+          </a:p>
+          <a:p>
+            <a:r>
+              <a:rPr sz="800" b="0" i="0">
+                <a:solidFill>
+                  <a:srgbClr val="C9D1D9"/>
+                </a:solidFill>
+              </a:rPr>
+              <a:t/>
+            </a:r>
           </a:p>
           <a:p>
             <a:r>
               <a:rPr sz="800" b="1" i="0">
                 <a:solidFill>
-                  <a:srgbClr val="F7C948"/>
-                </a:solidFill>
-              </a:rPr>
-              <a:t>automation/pipeline_runner.py</a:t>
-            </a:r>
-          </a:p>
-          <a:p>
-            <a:r>
-              <a:rPr sz="800" b="0" i="0">
-                <a:solidFill>
-                  <a:srgbClr val="C9D1D9"/>
-                </a:solidFill>
-              </a:rPr>
-              <a:t>  Subprocess wrapper  |  stdout capture  |  state file</a:t>
-            </a:r>
-          </a:p>
-          <a:p>
-            <a:endParaRPr sz="800" b="0" i="0">
-              <a:solidFill>
-                <a:srgbClr val="C9D1D9"/>
-              </a:solidFill>
-            </a:endParaRPr>
-          </a:p>
-          <a:p>
-            <a:r>
-              <a:rPr sz="800" b="1" i="0">
-                <a:solidFill>
                   <a:srgbClr val="3FB950"/>
                 </a:solidFill>
               </a:rPr>
-              <a:t>Tested live: 'status' + 'Run pipeline' from WhatsApp  ✔</a:t>
+              <a:t>Tested live: status, run pipeline, run_ci  [DONE]</a:t>
             </a:r>
           </a:p>
         </p:txBody>
@@ -4624,7 +4587,6 @@
           <a:lstStyle/>
           <a:p>
             <a:pPr algn="ctr"/>
-            <a:endParaRPr/>
           </a:p>
         </p:txBody>
       </p:sp>
@@ -4668,7 +4630,6 @@
           <a:lstStyle/>
           <a:p>
             <a:pPr algn="ctr"/>
-            <a:endParaRPr/>
           </a:p>
         </p:txBody>
       </p:sp>
@@ -4701,7 +4662,7 @@
                   <a:srgbClr val="FFFFFF"/>
                 </a:solidFill>
               </a:rPr>
-              <a:t>⑥ PART 2 — AZURE CLOUD  (planned)</a:t>
+              <a:t>⑥ PART 2 — AZURE CLOUD  [IN PROGRESS]</a:t>
             </a:r>
           </a:p>
         </p:txBody>
@@ -4731,130 +4692,110 @@
             <a:r>
               <a:rPr sz="800" b="1" i="0">
                 <a:solidFill>
-                  <a:srgbClr val="BC8CFF"/>
-                </a:solidFill>
-              </a:rPr>
-              <a:t>Azure Data Lake Storage Gen2</a:t>
+                  <a:srgbClr val="3FB950"/>
+                </a:solidFill>
+              </a:rPr>
+              <a:t>+ Resource group + ADLS Gen2 provisioned</a:t>
+            </a:r>
+          </a:p>
+          <a:p>
+            <a:r>
+              <a:rPr sz="800" b="1" i="0">
+                <a:solidFill>
+                  <a:srgbClr val="3FB950"/>
+                </a:solidFill>
+              </a:rPr>
+              <a:t>+ Databricks Premium + Unity Catalog enabled</a:t>
+            </a:r>
+          </a:p>
+          <a:p>
+            <a:r>
+              <a:rPr sz="800" b="1" i="0">
+                <a:solidFill>
+                  <a:srgbClr val="3FB950"/>
+                </a:solidFill>
+              </a:rPr>
+              <a:t>+ Cluster running  (Standard_DS3_v2)</a:t>
+            </a:r>
+          </a:p>
+          <a:p>
+            <a:r>
+              <a:rPr sz="800" b="1" i="0">
+                <a:solidFill>
+                  <a:srgbClr val="3FB950"/>
+                </a:solidFill>
+              </a:rPr>
+              <a:t>+ 9 notebooks deployed via CI/CD  (abfss://)</a:t>
+            </a:r>
+          </a:p>
+          <a:p>
+            <a:r>
+              <a:rPr sz="800" b="1" i="0">
+                <a:solidFill>
+                  <a:srgbClr val="3FB950"/>
+                </a:solidFill>
+              </a:rPr>
+              <a:t>+ Secret scope configured</a:t>
+            </a:r>
+          </a:p>
+          <a:p>
+            <a:r>
+              <a:rPr sz="800" b="1" i="0">
+                <a:solidFill>
+                  <a:srgbClr val="F78C00"/>
+                </a:solidFill>
+              </a:rPr>
+              <a:t>o Run full pipeline 01-&gt;05 on Databricks</a:t>
             </a:r>
           </a:p>
           <a:p>
             <a:r>
               <a:rPr sz="800" b="0" i="0">
                 <a:solidFill>
+                  <a:srgbClr val="F78C00"/>
+                </a:solidFill>
+              </a:rPr>
+              <a:t>o Register Delta tables in Unity Catalog</a:t>
+            </a:r>
+          </a:p>
+          <a:p>
+            <a:r>
+              <a:rPr sz="800" b="0" i="0">
+                <a:solidFill>
+                  <a:srgbClr val="F78C00"/>
+                </a:solidFill>
+              </a:rPr>
+              <a:t>o Real Delta Sharing — Phase 8</a:t>
+            </a:r>
+          </a:p>
+          <a:p>
+            <a:r>
+              <a:rPr sz="800" b="0" i="0">
+                <a:solidFill>
+                  <a:srgbClr val="F78C00"/>
+                </a:solidFill>
+              </a:rPr>
+              <a:t>o Databricks Workflows — Phase 9</a:t>
+            </a:r>
+          </a:p>
+          <a:p>
+            <a:r>
+              <a:rPr sz="800" b="0" i="0">
+                <a:solidFill>
+                  <a:srgbClr val="F78C00"/>
+                </a:solidFill>
+              </a:rPr>
+              <a:t>o Azure Functions ChatOps — Phase 10</a:t>
+            </a:r>
+          </a:p>
+          <a:p>
+            <a:r>
+              <a:rPr sz="800" b="0" i="1">
+                <a:solidFill>
                   <a:srgbClr val="C9D1D9"/>
                 </a:solidFill>
               </a:rPr>
-              <a:t>  Replaces lake/ local folder</a:t>
-            </a:r>
-          </a:p>
-          <a:p>
-            <a:r>
-              <a:rPr sz="800" b="1" i="0">
-                <a:solidFill>
-                  <a:srgbClr val="BC8CFF"/>
-                </a:solidFill>
-              </a:rPr>
-              <a:t>Azure Databricks (paid)</a:t>
-            </a:r>
-          </a:p>
-          <a:p>
-            <a:r>
-              <a:rPr sz="800" b="0" i="0">
-                <a:solidFill>
-                  <a:srgbClr val="C9D1D9"/>
-                </a:solidFill>
-              </a:rPr>
-              <a:t>  Full Unity Catalog + Workflows</a:t>
-            </a:r>
-          </a:p>
-          <a:p>
-            <a:r>
-              <a:rPr sz="800" b="1" i="0">
-                <a:solidFill>
-                  <a:srgbClr val="BC8CFF"/>
-                </a:solidFill>
-              </a:rPr>
-              <a:t>Azure Data Factory</a:t>
-            </a:r>
-          </a:p>
-          <a:p>
-            <a:r>
-              <a:rPr sz="800" b="0" i="0">
-                <a:solidFill>
-                  <a:srgbClr val="C9D1D9"/>
-                </a:solidFill>
-              </a:rPr>
-              <a:t>  Replaces run_pipeline.py orchestrator</a:t>
-            </a:r>
-          </a:p>
-          <a:p>
-            <a:r>
-              <a:rPr sz="800" b="1" i="0">
-                <a:solidFill>
-                  <a:srgbClr val="BC8CFF"/>
-                </a:solidFill>
-              </a:rPr>
-              <a:t>Azure SQL Database</a:t>
-            </a:r>
-          </a:p>
-          <a:p>
-            <a:r>
-              <a:rPr sz="800" b="0" i="0">
-                <a:solidFill>
-                  <a:srgbClr val="C9D1D9"/>
-                </a:solidFill>
-              </a:rPr>
-              <a:t>  Replaces SQLite (1 JDBC line change)</a:t>
-            </a:r>
-          </a:p>
-          <a:p>
-            <a:r>
-              <a:rPr sz="800" b="1" i="0">
-                <a:solidFill>
-                  <a:srgbClr val="BC8CFF"/>
-                </a:solidFill>
-              </a:rPr>
-              <a:t>Azure Functions</a:t>
-            </a:r>
-          </a:p>
-          <a:p>
-            <a:r>
-              <a:rPr sz="800" b="0" i="0">
-                <a:solidFill>
-                  <a:srgbClr val="C9D1D9"/>
-                </a:solidFill>
-              </a:rPr>
-              <a:t>  Replaces FastAPI + ngrok</a:t>
-            </a:r>
-          </a:p>
-          <a:p>
-            <a:r>
-              <a:rPr sz="800" b="1" i="0">
-                <a:solidFill>
-                  <a:srgbClr val="BC8CFF"/>
-                </a:solidFill>
-              </a:rPr>
-              <a:t>Delta Sharing (managed)</a:t>
-            </a:r>
-          </a:p>
-          <a:p>
-            <a:r>
-              <a:rPr sz="800" b="0" i="0">
-                <a:solidFill>
-                  <a:srgbClr val="C9D1D9"/>
-                </a:solidFill>
-              </a:rPr>
-              <a:t>  Real protocol, no simulation needed</a:t>
-            </a:r>
-          </a:p>
-          <a:p>
-            <a:r>
-              <a:rPr sz="800" b="0" i="0">
-                <a:solidFill>
-                  <a:srgbClr val="C9D1D9"/>
-                </a:solidFill>
-              </a:rPr>
-              <a:t>Same WhatsApp + Claude AI layer  →  no change</a:t>
+              <a:t>Budget: ~$5-8/month  |  Production: ~$80-120/month</a:t>
             </a:r>
           </a:p>
         </p:txBody>
@@ -4899,7 +4840,6 @@
           <a:lstStyle/>
           <a:p>
             <a:pPr algn="ctr"/>
-            <a:endParaRPr/>
           </a:p>
         </p:txBody>
       </p:sp>
@@ -5136,7 +5076,7 @@
                   <a:srgbClr val="3FB950"/>
                 </a:solidFill>
               </a:rPr>
-              <a:t>~5 min</a:t>
+              <a:t>~234s</a:t>
             </a:r>
           </a:p>
         </p:txBody>
@@ -5204,7 +5144,7 @@
                   <a:srgbClr val="3FB950"/>
                 </a:solidFill>
               </a:rPr>
-              <a:t>6</a:t>
+              <a:t>7</a:t>
             </a:r>
           </a:p>
         </p:txBody>
@@ -5272,7 +5212,7 @@
                   <a:srgbClr val="3FB950"/>
                 </a:solidFill>
               </a:rPr>
-              <a:t>3</a:t>
+              <a:t>9</a:t>
             </a:r>
           </a:p>
         </p:txBody>
@@ -5306,7 +5246,8 @@
                   <a:srgbClr val="C9D1D9"/>
                 </a:solidFill>
               </a:rPr>
-              <a:t>Automation Files</a:t>
+              <a:t>Notebooks
+Deployed</a:t>
             </a:r>
           </a:p>
         </p:txBody>
@@ -5340,7 +5281,7 @@
                   <a:srgbClr val="3FB950"/>
                 </a:solidFill>
               </a:rPr>
-              <a:t>14</a:t>
+              <a:t>CI/CD</a:t>
             </a:r>
           </a:p>
         </p:txBody>
@@ -5374,7 +5315,7 @@
                   <a:srgbClr val="C9D1D9"/>
                 </a:solidFill>
               </a:rPr>
-              <a:t>Sections Done</a:t>
+              <a:t>GitHub Actions</a:t>
             </a:r>
           </a:p>
         </p:txBody>
@@ -5408,7 +5349,7 @@
                   <a:srgbClr val="3FB950"/>
                 </a:solidFill>
               </a:rPr>
-              <a:t>✔ LIVE</a:t>
+              <a:t>LIVE</a:t>
             </a:r>
           </a:p>
         </p:txBody>
@@ -5487,7 +5428,6 @@
           <a:lstStyle/>
           <a:p>
             <a:pPr algn="ctr"/>
-            <a:endParaRPr/>
           </a:p>
         </p:txBody>
       </p:sp>
@@ -5622,7 +5562,7 @@
                   <a:srgbClr val="C9D1D9"/>
                 </a:solidFill>
               </a:rPr>
-              <a:t>Databricks Community Edition  |  DBFS  |  dbutils.notebook.run()  |  REST API 2.1</a:t>
+              <a:t>Azure Databricks Premium  |  Unity Catalog  |  ADLS Gen2 (abfss://)  |  GitHub Actions CI/CD</a:t>
             </a:r>
           </a:p>
         </p:txBody>
@@ -5701,7 +5641,6 @@
           <a:lstStyle/>
           <a:p>
             <a:pPr algn="ctr"/>
-            <a:endParaRPr/>
           </a:p>
         </p:txBody>
       </p:sp>
@@ -5768,7 +5707,7 @@
                   <a:srgbClr val="C9D1D9"/>
                 </a:solidFill>
               </a:rPr>
-              <a:t>• PYSPARK_PYTHON = sys.executable  (App Execution Alias bypass)</a:t>
+              <a:t>- PYSPARK_PYTHON = sys.executable  (App Execution Alias bypass)</a:t>
             </a:r>
           </a:p>
         </p:txBody>
@@ -5802,7 +5741,7 @@
                   <a:srgbClr val="C9D1D9"/>
                 </a:solidFill>
               </a:rPr>
-              <a:t>• lake/ path  (ACL-locked data/ directories)</a:t>
+              <a:t>- data/lake/ path  (ACL-locked lake/ directories — Python creates with write ACL)</a:t>
             </a:r>
           </a:p>
         </p:txBody>
@@ -5836,7 +5775,7 @@
                   <a:srgbClr val="C9D1D9"/>
                 </a:solidFill>
               </a:rPr>
-              <a:t>• mode(append) + clear_directory_contents()  (Parquet overwrite)</a:t>
+              <a:t>- CSV via toPandas().to_csv()  (replaces Parquet for time series drop)</a:t>
             </a:r>
           </a:p>
         </p:txBody>
@@ -5870,7 +5809,7 @@
                   <a:srgbClr val="C9D1D9"/>
                 </a:solidFill>
               </a:rPr>
-              <a:t>• sys.stdout.reconfigure(encoding='utf-8')  (Unicode on Windows)</a:t>
+              <a:t>- mode(overwrite) + shutil.move()  (Parquet overwrite on Windows)</a:t>
             </a:r>
           </a:p>
         </p:txBody>
@@ -5904,7 +5843,7 @@
                   <a:srgbClr val="C9D1D9"/>
                 </a:solidFill>
               </a:rPr>
-              <a:t>• SQLite JDBC type casts  (DateType/DoubleType mismatch)</a:t>
+              <a:t>- sys.stdout.reconfigure(encoding='utf-8')  (Unicode on Windows)</a:t>
             </a:r>
           </a:p>
         </p:txBody>
@@ -5938,7 +5877,7 @@
                   <a:srgbClr val="C9D1D9"/>
                 </a:solidFill>
               </a:rPr>
-              <a:t>• load_dotenv(path)  (explicit .env path for FastAPI)</a:t>
+              <a:t>- SQLite JDBC type casts  (DateType/DoubleType mismatch)</a:t>
             </a:r>
           </a:p>
         </p:txBody>
@@ -5983,7 +5922,6 @@
           <a:lstStyle/>
           <a:p>
             <a:pPr algn="ctr"/>
-            <a:endParaRPr/>
           </a:p>
         </p:txBody>
       </p:sp>
@@ -6016,7 +5954,7 @@
                   <a:srgbClr val="FFFFFF"/>
                 </a:solidFill>
               </a:rPr>
-              <a:t>Utilitics Data Sharing POC  |  Part 1 Complete — Part 2: Azure Cloud Migration  |  2026-03-19</a:t>
+              <a:t>Utilitics Data Sharing POC  |  Part 1 Complete — Part 2: Azure Cloud In Progress  |  2026-04-08</a:t>
             </a:r>
           </a:p>
         </p:txBody>
